--- a/slides/NB6015CEM_S2_Slides.pptx
+++ b/slides/NB6015CEM_S2_Slides.pptx
@@ -617,7 +617,7 @@
 DESCRIPTIVE VERSION:
 Several approaches to detecting credential-stuffing have been proposed. Perera (2021) developed a rate-limiting method that blocks IP addresses after a threshold of failed logins. Silva and Fernando (2022) proposed a machine-learning classifier using login-frequency features. Jayawardena (2023) used device fingerprinting to identify suspicious sessions. Each of these studies reports high detection rates. These approaches show that credential-stuffing detection is an active area of research.
 CRITICAL VERSION:
-Detection approaches for credential-stuffing divide broadly into threshold-based and feature-based methods, and the division matters for a SOC that must keep false positives low. Threshold methods such as IP rate-limiting (Perera, 2021) are cheap to deploy but degrade against distributed attacks that stay under per-IP limits, which is the precise case a mobile-banking endpoint faces. Feature-based classifiers (Silva and Fernando, 2022; Jayawardena, 2023) address distribution by scoring behaviour rather than volume, but both evaluate on web traffic with stable client fingerprints, whereas mobile clients churn device and network identifiers in ways that may inflate false positives. No reviewed study evaluates feature-based detection on mobile-banking authentication specifically, and none reports a false-positive rate against a triage threshold. That absence is the gap this project occupies, and it is what the research question's comparison against a rate-limiting baseline is designed to test.
+Detection approaches for credential-stuffing divide broadly into threshold-based and feature-based methods, and the division matters for a SOC that must keep false positives low. Threshold methods such as IP rate-limiting (Perera, 2021) are cheap to deploy but degrade against distributed attacks that stay under per-IP limits, which is the precise case a mobile-banking endpoint faces. Feature-based classifiers (Silva &amp; Fernando, 2022; Jayawardena, 2023) address distribution by scoring behaviour rather than volume, but both evaluate on web traffic with stable client fingerprints, whereas mobile clients churn device and network identifiers in ways that may inflate false positives. No reviewed study evaluates feature-based detection on mobile-banking authentication specifically, and none reports a false-positive rate against a triage threshold. That absence is the gap this project occupies, and it is what the research question's comparison against a rate-limiting baseline is designed to test.
 NAMED MOVE: from "X did A, Y did B, Z did C" to "these methods split into approaches A and B; A fails in my context, B has limitation L in my context, and nobody has tested either in context C, which is my gap."</a:t>
             </a:r>
             <a:endParaRPr lang="en-US" dirty="0"/>
@@ -3998,7 +3998,7 @@
                 <a:ea typeface="Open Sans" pitchFamily="34" charset="-122"/>
                 <a:cs typeface="Open Sans" pitchFamily="34" charset="-120"/>
               </a:rPr>
-              <a:t>Cluster sources by approach or claim, not by author and date. "Threshold methods (Perera, 2021) and feature-based methods (Silva and Fernando, 2022; Jayawardena, 2023) differ in how they handle distributed traffic."</a:t>
+              <a:t>Cluster sources by approach or claim, not by author and date. "Threshold methods (Perera, 2021) and feature-based methods (Silva &amp; Fernando, 2022; Jayawardena, 2023) differ in how they handle distributed traffic."</a:t>
             </a:r>
             <a:endParaRPr lang="en-US" sz="1200" dirty="0"/>
           </a:p>
@@ -7843,7 +7843,7 @@
                 <a:ea typeface="Open Sans" pitchFamily="34" charset="-122"/>
                 <a:cs typeface="Open Sans" pitchFamily="34" charset="-120"/>
               </a:rPr>
-              <a:t>Rose, S., Borchert, O., Mitchell, S., and Connelly, S. (2020). Zero trust architecture (NIST SP 800-207). National Institute of Standards and Technology. https://doi.org/10.6028/NIST.SP.800-207</a:t>
+              <a:t>Rose, S., Borchert, O., Mitchell, S., &amp; Connelly, S. (2020). Zero trust architecture (NIST SP 800-207). National Institute of Standards and Technology. https://doi.org/10.6028/NIST.SP.800-207</a:t>
             </a:r>
             <a:endParaRPr lang="en-US" sz="1100" dirty="0"/>
           </a:p>
@@ -9026,7 +9026,7 @@
                 <a:ea typeface="Open Sans" pitchFamily="34" charset="-122"/>
                 <a:cs typeface="Open Sans" pitchFamily="34" charset="-120"/>
               </a:rPr>
-              <a:t>Last modified: 3 October 2026</a:t>
+              <a:t>Last modified: 5 October 2026</a:t>
             </a:r>
             <a:endParaRPr lang="en-US" sz="1300" dirty="0"/>
           </a:p>
